--- a/dist/초6/영어/듣기와읽기/초6_영어_듣기와읽기_02_사건순서파악_학생용.pptx
+++ b/dist/초6/영어/듣기와읽기/초6_영어_듣기와읽기_02_사건순서파악_학생용.pptx
@@ -119,19 +119,19 @@
   <p:extLst>
     <p:ext uri="{521415D9-36F7-43E2-AB2F-B90AF26B5E84}">
       <p14:sectionLst xmlns:p14="http://schemas.microsoft.com/office/powerpoint/2010/main">
-        <p14:section name="도입" id="{ad6d6528-dc38-f8d7-198e-a8fb90812e43}">
+        <p14:section name="도입" id="{7897f1b5-6472-4e3b-9987-97a9a169902d}">
           <p14:sldIdLst>
             <p14:sldId id="256"/>
             <p14:sldId id="257"/>
           </p14:sldIdLst>
         </p14:section>
-        <p14:section name="개념" id="{2ebbe843-a2c3-2abb-7bef-d75c64dbe777}">
+        <p14:section name="개념" id="{8354c959-144e-38e0-ceaf-24e3a1f0cc65}">
           <p14:sldIdLst>
             <p14:sldId id="258"/>
             <p14:sldId id="259"/>
           </p14:sldIdLst>
         </p14:section>
-        <p14:section name="연습" id="{9b229449-3e99-8647-f638-581fd88918da}">
+        <p14:section name="연습" id="{fe03c10a-3b30-dc2e-e89c-2bd6229d8740}">
           <p14:sldIdLst>
             <p14:sldId id="260"/>
             <p14:sldId id="261"/>
@@ -140,18 +140,18 @@
             <p14:sldId id="264"/>
           </p14:sldIdLst>
         </p14:section>
-        <p14:section name="확인" id="{7c05a958-5281-d6b3-085c-69f79b4f4957}">
+        <p14:section name="확인" id="{09068089-ad87-392f-5867-7232460af5ba}">
           <p14:sldIdLst>
             <p14:sldId id="265"/>
             <p14:sldId id="266"/>
           </p14:sldIdLst>
         </p14:section>
-        <p14:section name="정리" id="{8e4aaa9e-415b-ec45-3d38-8be4dc2f2309}">
+        <p14:section name="정리" id="{183925e7-cfce-576f-b4d4-e9a811bdbdd1}">
           <p14:sldIdLst>
             <p14:sldId id="267"/>
           </p14:sldIdLst>
         </p14:section>
-        <p14:section name="보충" id="{84fa1945-efd1-b8af-c4d7-2cdc9733bb8f}">
+        <p14:section name="보충" id="{41ff6764-f40f-a44c-f147-dcbde65c92f8}">
           <p14:sldIdLst>
             <p14:sldId id="268"/>
           </p14:sldIdLst>
@@ -5731,12 +5731,12 @@
         </p:nvSpPr>
         <p:spPr>
           <a:xfrm>
-            <a:off x="548640" y="2373376"/>
-            <a:ext cx="2464308" cy="1371600"/>
+            <a:off x="548640" y="2281936"/>
+            <a:ext cx="2464308" cy="1554480"/>
           </a:xfrm>
           <a:prstGeom prst="roundRect">
             <a:avLst>
-              <a:gd name="adj" fmla="val 8000"/>
+              <a:gd name="adj" fmla="val 7059"/>
             </a:avLst>
           </a:prstGeom>
           <a:solidFill>
@@ -5756,7 +5756,7 @@
               <a:buNone/>
             </a:pPr>
             <a:r>
-              <a:rPr lang="en-US" altLang="ko-KR" sz="2200" b="1" dirty="0">
+              <a:rPr lang="en-US" altLang="ko-KR" sz="2600" b="1" dirty="0">
                 <a:solidFill>
                   <a:srgbClr val="1F2937"/>
                 </a:solidFill>
@@ -5766,14 +5766,14 @@
               </a:rPr>
               <a:t>First</a:t>
             </a:r>
-            <a:endParaRPr lang="ko-KR" sz="2200" dirty="0"/>
+            <a:endParaRPr lang="ko-KR" sz="2600" dirty="0"/>
           </a:p>
           <a:p>
             <a:pPr eaLnBrk="0" algn="ctr" indent="0" marL="0">
               <a:buNone/>
             </a:pPr>
             <a:r>
-              <a:rPr lang="ko-KR" altLang="en-US" sz="2200" b="1" dirty="0">
+              <a:rPr lang="ko-KR" altLang="en-US" sz="2600" b="1" dirty="0">
                 <a:solidFill>
                   <a:srgbClr val="1F2937"/>
                 </a:solidFill>
@@ -5783,7 +5783,7 @@
               </a:rPr>
               <a:t>먼저</a:t>
             </a:r>
-            <a:endParaRPr lang="ko-KR" sz="2200" dirty="0"/>
+            <a:endParaRPr lang="ko-KR" sz="2600" dirty="0"/>
           </a:p>
         </p:txBody>
       </p:sp>
@@ -5819,12 +5819,12 @@
         </p:nvSpPr>
         <p:spPr>
           <a:xfrm>
-            <a:off x="3424428" y="2373376"/>
-            <a:ext cx="2464308" cy="1371600"/>
+            <a:off x="3424428" y="2281936"/>
+            <a:ext cx="2464308" cy="1554480"/>
           </a:xfrm>
           <a:prstGeom prst="roundRect">
             <a:avLst>
-              <a:gd name="adj" fmla="val 8000"/>
+              <a:gd name="adj" fmla="val 7059"/>
             </a:avLst>
           </a:prstGeom>
           <a:solidFill>
@@ -5844,7 +5844,7 @@
               <a:buNone/>
             </a:pPr>
             <a:r>
-              <a:rPr lang="en-US" altLang="ko-KR" sz="2200" b="1" dirty="0">
+              <a:rPr lang="en-US" altLang="ko-KR" sz="2600" b="1" dirty="0">
                 <a:solidFill>
                   <a:srgbClr val="1F2937"/>
                 </a:solidFill>
@@ -5854,14 +5854,14 @@
               </a:rPr>
               <a:t>Then</a:t>
             </a:r>
-            <a:endParaRPr lang="ko-KR" sz="2200" dirty="0"/>
+            <a:endParaRPr lang="ko-KR" sz="2600" dirty="0"/>
           </a:p>
           <a:p>
             <a:pPr eaLnBrk="0" algn="ctr" indent="0" marL="0">
               <a:buNone/>
             </a:pPr>
             <a:r>
-              <a:rPr lang="ko-KR" altLang="en-US" sz="2200" b="1" dirty="0">
+              <a:rPr lang="ko-KR" altLang="en-US" sz="2600" b="1" dirty="0">
                 <a:solidFill>
                   <a:srgbClr val="1F2937"/>
                 </a:solidFill>
@@ -5871,7 +5871,7 @@
               </a:rPr>
               <a:t>그다음에</a:t>
             </a:r>
-            <a:endParaRPr lang="ko-KR" sz="2200" dirty="0"/>
+            <a:endParaRPr lang="ko-KR" sz="2600" dirty="0"/>
           </a:p>
         </p:txBody>
       </p:sp>
@@ -5907,12 +5907,12 @@
         </p:nvSpPr>
         <p:spPr>
           <a:xfrm>
-            <a:off x="6300216" y="2373376"/>
-            <a:ext cx="2464308" cy="1371600"/>
+            <a:off x="6300216" y="2281936"/>
+            <a:ext cx="2464308" cy="1554480"/>
           </a:xfrm>
           <a:prstGeom prst="roundRect">
             <a:avLst>
-              <a:gd name="adj" fmla="val 8000"/>
+              <a:gd name="adj" fmla="val 7059"/>
             </a:avLst>
           </a:prstGeom>
           <a:solidFill>
@@ -5932,7 +5932,7 @@
               <a:buNone/>
             </a:pPr>
             <a:r>
-              <a:rPr lang="en-US" altLang="ko-KR" sz="2200" b="1" dirty="0">
+              <a:rPr lang="en-US" altLang="ko-KR" sz="2600" b="1" dirty="0">
                 <a:solidFill>
                   <a:srgbClr val="1F2937"/>
                 </a:solidFill>
@@ -5942,14 +5942,14 @@
               </a:rPr>
               <a:t>Next</a:t>
             </a:r>
-            <a:endParaRPr lang="ko-KR" sz="2200" dirty="0"/>
+            <a:endParaRPr lang="ko-KR" sz="2600" dirty="0"/>
           </a:p>
           <a:p>
             <a:pPr eaLnBrk="0" algn="ctr" indent="0" marL="0">
               <a:buNone/>
             </a:pPr>
             <a:r>
-              <a:rPr lang="ko-KR" altLang="en-US" sz="2200" b="1" dirty="0">
+              <a:rPr lang="ko-KR" altLang="en-US" sz="2600" b="1" dirty="0">
                 <a:solidFill>
                   <a:srgbClr val="1F2937"/>
                 </a:solidFill>
@@ -5959,7 +5959,7 @@
               </a:rPr>
               <a:t>그다음에</a:t>
             </a:r>
-            <a:endParaRPr lang="ko-KR" sz="2200" dirty="0"/>
+            <a:endParaRPr lang="ko-KR" sz="2600" dirty="0"/>
           </a:p>
         </p:txBody>
       </p:sp>
@@ -5995,12 +5995,12 @@
         </p:nvSpPr>
         <p:spPr>
           <a:xfrm>
-            <a:off x="9176004" y="2373376"/>
-            <a:ext cx="2464308" cy="1371600"/>
+            <a:off x="9176004" y="2281936"/>
+            <a:ext cx="2464308" cy="1554480"/>
           </a:xfrm>
           <a:prstGeom prst="roundRect">
             <a:avLst>
-              <a:gd name="adj" fmla="val 8000"/>
+              <a:gd name="adj" fmla="val 7059"/>
             </a:avLst>
           </a:prstGeom>
           <a:solidFill>
@@ -6020,7 +6020,7 @@
               <a:buNone/>
             </a:pPr>
             <a:r>
-              <a:rPr lang="en-US" altLang="ko-KR" sz="2200" b="1" dirty="0">
+              <a:rPr lang="en-US" altLang="ko-KR" sz="2600" b="1" dirty="0">
                 <a:solidFill>
                   <a:srgbClr val="1F2937"/>
                 </a:solidFill>
@@ -6030,14 +6030,14 @@
               </a:rPr>
               <a:t>Finally</a:t>
             </a:r>
-            <a:endParaRPr lang="ko-KR" sz="2200" dirty="0"/>
+            <a:endParaRPr lang="ko-KR" sz="2600" dirty="0"/>
           </a:p>
           <a:p>
             <a:pPr eaLnBrk="0" algn="ctr" indent="0" marL="0">
               <a:buNone/>
             </a:pPr>
             <a:r>
-              <a:rPr lang="ko-KR" altLang="en-US" sz="2200" b="1" dirty="0">
+              <a:rPr lang="ko-KR" altLang="en-US" sz="2600" b="1" dirty="0">
                 <a:solidFill>
                   <a:srgbClr val="1F2937"/>
                 </a:solidFill>
@@ -6047,7 +6047,7 @@
               </a:rPr>
               <a:t>마지막으로</a:t>
             </a:r>
-            <a:endParaRPr lang="ko-KR" sz="2200" dirty="0"/>
+            <a:endParaRPr lang="ko-KR" sz="2600" dirty="0"/>
           </a:p>
         </p:txBody>
       </p:sp>

--- a/dist/초6/영어/듣기와읽기/초6_영어_듣기와읽기_02_사건순서파악_학생용.pptx
+++ b/dist/초6/영어/듣기와읽기/초6_영어_듣기와읽기_02_사건순서파악_학생용.pptx
@@ -119,19 +119,19 @@
   <p:extLst>
     <p:ext uri="{521415D9-36F7-43E2-AB2F-B90AF26B5E84}">
       <p14:sectionLst xmlns:p14="http://schemas.microsoft.com/office/powerpoint/2010/main">
-        <p14:section name="도입" id="{7897f1b5-6472-4e3b-9987-97a9a169902d}">
+        <p14:section name="도입" id="{3412c164-4c7b-1268-457b-c9e45d97b5c9}">
           <p14:sldIdLst>
             <p14:sldId id="256"/>
             <p14:sldId id="257"/>
           </p14:sldIdLst>
         </p14:section>
-        <p14:section name="개념" id="{8354c959-144e-38e0-ceaf-24e3a1f0cc65}">
+        <p14:section name="개념" id="{ad8d5732-c816-31a4-eef5-4f03306c5883}">
           <p14:sldIdLst>
             <p14:sldId id="258"/>
             <p14:sldId id="259"/>
           </p14:sldIdLst>
         </p14:section>
-        <p14:section name="연습" id="{fe03c10a-3b30-dc2e-e89c-2bd6229d8740}">
+        <p14:section name="연습" id="{c0c46c2d-f38e-0527-5da6-87968fefbc90}">
           <p14:sldIdLst>
             <p14:sldId id="260"/>
             <p14:sldId id="261"/>
@@ -140,18 +140,18 @@
             <p14:sldId id="264"/>
           </p14:sldIdLst>
         </p14:section>
-        <p14:section name="확인" id="{09068089-ad87-392f-5867-7232460af5ba}">
+        <p14:section name="확인" id="{ef30c9fb-e57e-a8f3-8e4a-e94b5116d456}">
           <p14:sldIdLst>
             <p14:sldId id="265"/>
             <p14:sldId id="266"/>
           </p14:sldIdLst>
         </p14:section>
-        <p14:section name="정리" id="{183925e7-cfce-576f-b4d4-e9a811bdbdd1}">
+        <p14:section name="정리" id="{0f3a79b6-b46e-cdef-a137-49d905b94d5a}">
           <p14:sldIdLst>
             <p14:sldId id="267"/>
           </p14:sldIdLst>
         </p14:section>
-        <p14:section name="보충" id="{41ff6764-f40f-a44c-f147-dcbde65c92f8}">
+        <p14:section name="보충" id="{f41e4cd7-21cd-b3dd-b68a-a42e8934631c}">
           <p14:sldIdLst>
             <p14:sldId id="268"/>
           </p14:sldIdLst>
